--- a/docs/Foodi.pptx
+++ b/docs/Foodi.pptx
@@ -3959,7 +3959,7 @@
                   <a:srgbClr val="1C1F24"/>
                 </a:solidFill>
               </a:rPr>
-              <a:t>Pairing: owner joins the CCM to the home Wi-Fi, pairs the feeder over</a:t>
+              <a:t>Setup: owner joins the CCM to the home Wi-Fi once via Arduino App Lab,</a:t>
             </a:r>
           </a:p>
           <a:p>
@@ -3974,7 +3974,7 @@
                   <a:srgbClr val="1C1F24"/>
                 </a:solidFill>
               </a:rPr>
-              <a:t>Bluetooth, and the feeder joins Wi-Fi for smooth video.</a:t>
+              <a:t>pairs the feeder over Bluetooth, and the feeder joins Wi-Fi for video.</a:t>
             </a:r>
           </a:p>
         </p:txBody>

--- a/docs/Foodi.pptx
+++ b/docs/Foodi.pptx
@@ -4626,6 +4626,43 @@
                 </a:solidFill>
               </a:rPr>
               <a:t>•  Demo insight: intake 45% below the 14-day average for 2 days -&gt; alert</a:t>
+            </a:r>
+          </a:p>
+          <a:p>
+            <a:pPr>
+              <a:spcAft>
+                <a:spcPts val="800"/>
+              </a:spcAft>
+            </a:pPr>
+          </a:p>
+          <a:p>
+            <a:pPr>
+              <a:spcAft>
+                <a:spcPts val="800"/>
+              </a:spcAft>
+            </a:pPr>
+            <a:r>
+              <a:rPr sz="1800" b="0">
+                <a:solidFill>
+                  <a:srgbClr val="E8743B"/>
+                </a:solidFill>
+              </a:rPr>
+              <a:t>Fits the UNO Q (measured, pinned to 1 core):</a:t>
+            </a:r>
+          </a:p>
+          <a:p>
+            <a:pPr>
+              <a:spcAft>
+                <a:spcPts val="800"/>
+              </a:spcAft>
+            </a:pPr>
+            <a:r>
+              <a:rPr sz="1800" b="0">
+                <a:solidFill>
+                  <a:srgbClr val="E8743B"/>
+                </a:solidFill>
+              </a:rPr>
+              <a:t>•  190 MB RAM of 2 GB, 25% CPU, 12 detections/s (need 1-2)</a:t>
             </a:r>
           </a:p>
         </p:txBody>
